--- a/Schulabschluss_DataStory_Praesentation.pptx
+++ b/Schulabschluss_DataStory_Praesentation.pptx
@@ -10038,8 +10038,8 @@
         </p:blipFill>
         <p:spPr>
           <a:xfrm>
-            <a:off x="5989320" y="1917808"/>
-            <a:ext cx="5943600" cy="4211103"/>
+            <a:off x="5989320" y="2886151"/>
+            <a:ext cx="5943600" cy="2274417"/>
           </a:xfrm>
           <a:prstGeom prst="rect">
             <a:avLst/>

--- a/Schulabschluss_DataStory_Praesentation.pptx
+++ b/Schulabschluss_DataStory_Praesentation.pptx
@@ -5172,8 +5172,8 @@
         </p:blipFill>
         <p:spPr>
           <a:xfrm>
-            <a:off x="5989320" y="2436333"/>
-            <a:ext cx="5943600" cy="3174052"/>
+            <a:off x="5989320" y="2436418"/>
+            <a:ext cx="5943600" cy="3173882"/>
           </a:xfrm>
           <a:prstGeom prst="rect">
             <a:avLst/>
@@ -8286,8 +8286,8 @@
         </p:blipFill>
         <p:spPr>
           <a:xfrm>
-            <a:off x="5989320" y="2131823"/>
-            <a:ext cx="5943600" cy="3783073"/>
+            <a:off x="5989320" y="2129332"/>
+            <a:ext cx="5943600" cy="3788054"/>
           </a:xfrm>
           <a:prstGeom prst="rect">
             <a:avLst/>

--- a/Schulabschluss_DataStory_Praesentation.pptx
+++ b/Schulabschluss_DataStory_Praesentation.pptx
@@ -4778,8 +4778,8 @@
         </p:blipFill>
         <p:spPr>
           <a:xfrm>
-            <a:off x="5989320" y="2504677"/>
-            <a:ext cx="5943600" cy="3037365"/>
+            <a:off x="5989320" y="2264054"/>
+            <a:ext cx="5943600" cy="3518611"/>
           </a:xfrm>
           <a:prstGeom prst="rect">
             <a:avLst/>
@@ -5172,8 +5172,8 @@
         </p:blipFill>
         <p:spPr>
           <a:xfrm>
-            <a:off x="5989320" y="2436418"/>
-            <a:ext cx="5943600" cy="3173882"/>
+            <a:off x="5989320" y="2353208"/>
+            <a:ext cx="5943600" cy="3340303"/>
           </a:xfrm>
           <a:prstGeom prst="rect">
             <a:avLst/>
@@ -7892,8 +7892,8 @@
         </p:blipFill>
         <p:spPr>
           <a:xfrm>
-            <a:off x="5989320" y="2749294"/>
-            <a:ext cx="5943600" cy="2548131"/>
+            <a:off x="5989320" y="2373020"/>
+            <a:ext cx="5943600" cy="3300679"/>
           </a:xfrm>
           <a:prstGeom prst="rect">
             <a:avLst/>
@@ -8286,8 +8286,8 @@
         </p:blipFill>
         <p:spPr>
           <a:xfrm>
-            <a:off x="5989320" y="2129332"/>
-            <a:ext cx="5943600" cy="3788054"/>
+            <a:off x="5989320" y="2061972"/>
+            <a:ext cx="5943600" cy="3922776"/>
           </a:xfrm>
           <a:prstGeom prst="rect">
             <a:avLst/>
@@ -8680,8 +8680,8 @@
         </p:blipFill>
         <p:spPr>
           <a:xfrm>
-            <a:off x="5989320" y="2099127"/>
-            <a:ext cx="5943600" cy="3848465"/>
+            <a:off x="5989320" y="2353208"/>
+            <a:ext cx="5943600" cy="3340303"/>
           </a:xfrm>
           <a:prstGeom prst="rect">
             <a:avLst/>
@@ -10038,8 +10038,8 @@
         </p:blipFill>
         <p:spPr>
           <a:xfrm>
-            <a:off x="5989320" y="2886151"/>
-            <a:ext cx="5943600" cy="2274417"/>
+            <a:off x="5989320" y="2345283"/>
+            <a:ext cx="5943600" cy="3356152"/>
           </a:xfrm>
           <a:prstGeom prst="rect">
             <a:avLst/>

--- a/Schulabschluss_DataStory_Praesentation.pptx
+++ b/Schulabschluss_DataStory_Praesentation.pptx
@@ -4778,8 +4778,8 @@
         </p:blipFill>
         <p:spPr>
           <a:xfrm>
-            <a:off x="5989320" y="2264054"/>
-            <a:ext cx="5943600" cy="3518611"/>
+            <a:off x="6168774" y="1737360"/>
+            <a:ext cx="5584690" cy="4572000"/>
           </a:xfrm>
           <a:prstGeom prst="rect">
             <a:avLst/>
@@ -5172,8 +5172,8 @@
         </p:blipFill>
         <p:spPr>
           <a:xfrm>
-            <a:off x="5989320" y="2353208"/>
-            <a:ext cx="5943600" cy="3340303"/>
+            <a:off x="5989320" y="2341321"/>
+            <a:ext cx="5943600" cy="3364077"/>
           </a:xfrm>
           <a:prstGeom prst="rect">
             <a:avLst/>
@@ -7892,8 +7892,8 @@
         </p:blipFill>
         <p:spPr>
           <a:xfrm>
-            <a:off x="5989320" y="2373020"/>
-            <a:ext cx="5943600" cy="3300679"/>
+            <a:off x="5989320" y="2063953"/>
+            <a:ext cx="5943600" cy="3918813"/>
           </a:xfrm>
           <a:prstGeom prst="rect">
             <a:avLst/>
@@ -8286,8 +8286,8 @@
         </p:blipFill>
         <p:spPr>
           <a:xfrm>
-            <a:off x="5989320" y="2061972"/>
-            <a:ext cx="5943600" cy="3922776"/>
+            <a:off x="5989320" y="2111502"/>
+            <a:ext cx="5943600" cy="3823716"/>
           </a:xfrm>
           <a:prstGeom prst="rect">
             <a:avLst/>
@@ -10038,8 +10038,8 @@
         </p:blipFill>
         <p:spPr>
           <a:xfrm>
-            <a:off x="5989320" y="2345283"/>
-            <a:ext cx="5943600" cy="3356152"/>
+            <a:off x="5989320" y="2333396"/>
+            <a:ext cx="5943600" cy="3379927"/>
           </a:xfrm>
           <a:prstGeom prst="rect">
             <a:avLst/>

--- a/Schulabschluss_DataStory_Praesentation.pptx
+++ b/Schulabschluss_DataStory_Praesentation.pptx
@@ -4778,8 +4778,8 @@
         </p:blipFill>
         <p:spPr>
           <a:xfrm>
-            <a:off x="6168774" y="1737360"/>
-            <a:ext cx="5584690" cy="4572000"/>
+            <a:off x="5989320" y="2087727"/>
+            <a:ext cx="5943600" cy="3871264"/>
           </a:xfrm>
           <a:prstGeom prst="rect">
             <a:avLst/>
@@ -5172,8 +5172,8 @@
         </p:blipFill>
         <p:spPr>
           <a:xfrm>
-            <a:off x="5989320" y="2341321"/>
-            <a:ext cx="5943600" cy="3364077"/>
+            <a:off x="5989320" y="2325471"/>
+            <a:ext cx="5943600" cy="3395776"/>
           </a:xfrm>
           <a:prstGeom prst="rect">
             <a:avLst/>
@@ -7892,8 +7892,8 @@
         </p:blipFill>
         <p:spPr>
           <a:xfrm>
-            <a:off x="5989320" y="2063953"/>
-            <a:ext cx="5943600" cy="3918813"/>
+            <a:off x="5989320" y="2087727"/>
+            <a:ext cx="5943600" cy="3871264"/>
           </a:xfrm>
           <a:prstGeom prst="rect">
             <a:avLst/>
@@ -8286,8 +8286,8 @@
         </p:blipFill>
         <p:spPr>
           <a:xfrm>
-            <a:off x="5989320" y="2111502"/>
-            <a:ext cx="5943600" cy="3823716"/>
+            <a:off x="5989320" y="2087727"/>
+            <a:ext cx="5943600" cy="3871264"/>
           </a:xfrm>
           <a:prstGeom prst="rect">
             <a:avLst/>
@@ -8680,8 +8680,8 @@
         </p:blipFill>
         <p:spPr>
           <a:xfrm>
-            <a:off x="5989320" y="2353208"/>
-            <a:ext cx="5943600" cy="3340303"/>
+            <a:off x="5989320" y="2325471"/>
+            <a:ext cx="5943600" cy="3395776"/>
           </a:xfrm>
           <a:prstGeom prst="rect">
             <a:avLst/>
@@ -10038,8 +10038,8 @@
         </p:blipFill>
         <p:spPr>
           <a:xfrm>
-            <a:off x="5989320" y="2333396"/>
-            <a:ext cx="5943600" cy="3379927"/>
+            <a:off x="5989320" y="2317546"/>
+            <a:ext cx="5943600" cy="3411626"/>
           </a:xfrm>
           <a:prstGeom prst="rect">
             <a:avLst/>

--- a/Schulabschluss_DataStory_Praesentation.pptx
+++ b/Schulabschluss_DataStory_Praesentation.pptx
@@ -655,7 +655,7 @@
           <a:lstStyle/>
           <a:p>
             <a:r>
-              <a:t>Aaron Ziegler - LF9. Risiko-Kreise verbinden hohes Bildungsrisiko (ohne HSA) und hohe Jugend-Arbeitslosigkeit: u. a. Pirmasens, Gelsenkirchen, Mansfeld-Südharz. Score z-standardisiert, gleich gewichtet. Jahresversatz 2023&lt;-&gt;2025 transparent dokumentiert.</a:t>
+              <a:t>Aaron Ziegler - LF9. Risiko-Kreise verbinden hohes Bildungsrisiko (ohne HSA), hohe Jugend-Arbeitslosigkeit und niedriges verfügbares Einkommen: Gelsenkirchen führt (Score 8,1) vor Pirmasens und Mansfeld-Südharz. Score z-standardisiert über drei Dimensionen, gleich gewichtet. Datenstände 2023/2025/2021 transparent dokumentiert.</a:t>
             </a:r>
           </a:p>
         </p:txBody>
@@ -1145,7 +1145,7 @@
           <a:lstStyle/>
           <a:p>
             <a:r>
-              <a:t>Max Budde - LF2/LF3. Es ist auch ein Kreisproblem: Hotspots Anhalt-Bitterfeld 16,8 %, Pirmasens 16,5 %. Der Boxplot zeigt: starke Streuung INNERHALB der Länder (z. B. Rheinland-Pfalz Spannweite 12,7 pp). Landesdurchschnitt verdeckt lokale Extreme. Übergabe an John Kanto.</a:t>
+              <a:t>Max Budde - LF2/LF3. Es ist auch ein Kreisproblem: Hotspots Anhalt-Bitterfeld 16,8 %, Pirmasens 16,5 %. Das Streudiagramm und die Streuungstabelle zeigen: starke Streuung INNERHALB der Länder (z. B. Rheinland-Pfalz Spannweite 12,7 pp). Landesdurchschnitt verdeckt lokale Extreme. Übergabe an John Kanto.</a:t>
             </a:r>
           </a:p>
         </p:txBody>
@@ -4778,8 +4778,8 @@
         </p:blipFill>
         <p:spPr>
           <a:xfrm>
-            <a:off x="5989320" y="2087727"/>
-            <a:ext cx="5943600" cy="3871264"/>
+            <a:off x="5989320" y="2083765"/>
+            <a:ext cx="5943600" cy="3879189"/>
           </a:xfrm>
           <a:prstGeom prst="rect">
             <a:avLst/>
@@ -5172,8 +5172,8 @@
         </p:blipFill>
         <p:spPr>
           <a:xfrm>
-            <a:off x="5989320" y="2325471"/>
-            <a:ext cx="5943600" cy="3395776"/>
+            <a:off x="5989320" y="2321509"/>
+            <a:ext cx="5943600" cy="3403701"/>
           </a:xfrm>
           <a:prstGeom prst="rect">
             <a:avLst/>
@@ -5217,7 +5217,7 @@
                 </a:solidFill>
                 <a:latin typeface="Calibri"/>
               </a:rPr>
-              <a:t>•  Pirmasens, Gelsenkirchen, Mansfeld-Südharz führen</a:t>
+              <a:t>•  Gelsenkirchen, Pirmasens, Mansfeld-Südharz führen</a:t>
             </a:r>
           </a:p>
           <a:p>
@@ -5236,7 +5236,7 @@
                 </a:solidFill>
                 <a:latin typeface="Calibri"/>
               </a:rPr>
-              <a:t>•  Hohe Quote ohne HSA + hohe Jugend-ALQ</a:t>
+              <a:t>•  Hohe Quote ohne HSA + hohe Jugend-ALQ + niedriges Einkommen</a:t>
             </a:r>
           </a:p>
           <a:p>
@@ -5255,7 +5255,7 @@
                 </a:solidFill>
                 <a:latin typeface="Calibri"/>
               </a:rPr>
-              <a:t>•  Score z-standardisiert, gleich gewichtet</a:t>
+              <a:t>•  Score z-standardisiert (3 Dimensionen), gleich gewichtet</a:t>
             </a:r>
           </a:p>
           <a:p>
@@ -5274,7 +5274,7 @@
                 </a:solidFill>
                 <a:latin typeface="Calibri"/>
               </a:rPr>
-              <a:t>•  Jahresversatz 2023↔2025 dokumentiert</a:t>
+              <a:t>•  Datenstände 2023/2025/2021 dokumentiert</a:t>
             </a:r>
           </a:p>
         </p:txBody>
@@ -5352,7 +5352,7 @@
                 </a:solidFill>
                 <a:latin typeface="Calibri"/>
               </a:rPr>
-              <a:t>Pirmasens: 16,5 % ohne HSA · 12,2 % Jugend-ALQ</a:t>
+              <a:t>Gelsenkirchen: Score 8,1 · 13,0 % ohne HSA · 13,4 % Jugend-ALQ</a:t>
             </a:r>
           </a:p>
         </p:txBody>
@@ -7892,8 +7892,8 @@
         </p:blipFill>
         <p:spPr>
           <a:xfrm>
-            <a:off x="5989320" y="2087727"/>
-            <a:ext cx="5943600" cy="3871264"/>
+            <a:off x="5989320" y="2081783"/>
+            <a:ext cx="5943600" cy="3883152"/>
           </a:xfrm>
           <a:prstGeom prst="rect">
             <a:avLst/>
@@ -8286,8 +8286,8 @@
         </p:blipFill>
         <p:spPr>
           <a:xfrm>
-            <a:off x="5989320" y="2087727"/>
-            <a:ext cx="5943600" cy="3871264"/>
+            <a:off x="5989320" y="2083765"/>
+            <a:ext cx="5943600" cy="3879189"/>
           </a:xfrm>
           <a:prstGeom prst="rect">
             <a:avLst/>
@@ -8680,8 +8680,8 @@
         </p:blipFill>
         <p:spPr>
           <a:xfrm>
-            <a:off x="5989320" y="2325471"/>
-            <a:ext cx="5943600" cy="3395776"/>
+            <a:off x="5989320" y="2081783"/>
+            <a:ext cx="5943600" cy="3883152"/>
           </a:xfrm>
           <a:prstGeom prst="rect">
             <a:avLst/>
@@ -10038,8 +10038,8 @@
         </p:blipFill>
         <p:spPr>
           <a:xfrm>
-            <a:off x="5989320" y="2317546"/>
-            <a:ext cx="5943600" cy="3411626"/>
+            <a:off x="5989320" y="2313584"/>
+            <a:ext cx="5943600" cy="3419551"/>
           </a:xfrm>
           <a:prstGeom prst="rect">
             <a:avLst/>
@@ -11104,7 +11104,7 @@
                 </a:solidFill>
                 <a:latin typeface="Cambria"/>
               </a:rPr>
-              <a:t>10.500 €</a:t>
+              <a:t>9.800 €</a:t>
             </a:r>
           </a:p>
         </p:txBody>

--- a/Schulabschluss_DataStory_Praesentation.pptx
+++ b/Schulabschluss_DataStory_Praesentation.pptx
@@ -1285,7 +1285,7 @@
           <a:lstStyle/>
           <a:p>
             <a:r>
-              <a:t>John Kanto - LF5 Schulartmix (DE 2023, Σ=100 %): Grundschulen 35,2 %, Gymnasien 25,9 %, Integr. Gesamtschulen 13,1 %. Der Gymnasial-/Gesamtschulanteil prägt die Abiturquote mit.</a:t>
+              <a:t>John Kanto - LF5 Schulartmix (DE 2023): Der Schulartmix prägt die Abschlussverteilung. Von 55.705 Abgängen ohne Hauptschulabschluss stellen Förderschulen 42 % (23.324), integrierte Gesamtschulen 22 %, Schularten mit mehreren Bildungsgängen 16 % und Hauptschulen 13 % - von Gymnasien nur rund 3 % (Destatis 21111-12, Landesebene).</a:t>
             </a:r>
           </a:p>
         </p:txBody>
@@ -9053,7 +9053,7 @@
                 </a:solidFill>
                 <a:latin typeface="Cambria"/>
               </a:rPr>
-              <a:t>LF5 — Der Schulartmix prägt die Abschlussstruktur</a:t>
+              <a:t>LF5 — Der Schulartmix prägt die Abschlussverteilung</a:t>
             </a:r>
           </a:p>
         </p:txBody>
@@ -9136,7 +9136,7 @@
                 </a:solidFill>
                 <a:latin typeface="Cambria"/>
               </a:rPr>
-              <a:t>35,2 %</a:t>
+              <a:t>42 %</a:t>
             </a:r>
           </a:p>
         </p:txBody>
@@ -9175,7 +9175,7 @@
                 </a:solidFill>
                 <a:latin typeface="Calibri"/>
               </a:rPr>
-              <a:t>Grundschulen</a:t>
+              <a:t>Förderschulen</a:t>
             </a:r>
           </a:p>
         </p:txBody>
@@ -9258,7 +9258,7 @@
                 </a:solidFill>
                 <a:latin typeface="Cambria"/>
               </a:rPr>
-              <a:t>25,9 %</a:t>
+              <a:t>22 %</a:t>
             </a:r>
           </a:p>
         </p:txBody>
@@ -9297,7 +9297,7 @@
                 </a:solidFill>
                 <a:latin typeface="Calibri"/>
               </a:rPr>
-              <a:t>Gymnasien</a:t>
+              <a:t>Integr. Gesamtschulen</a:t>
             </a:r>
           </a:p>
         </p:txBody>
@@ -9380,7 +9380,7 @@
                 </a:solidFill>
                 <a:latin typeface="Cambria"/>
               </a:rPr>
-              <a:t>13,1 %</a:t>
+              <a:t>16 %</a:t>
             </a:r>
           </a:p>
         </p:txBody>
@@ -9419,7 +9419,7 @@
                 </a:solidFill>
                 <a:latin typeface="Calibri"/>
               </a:rPr>
-              <a:t>Integr. Gesamtschulen</a:t>
+              <a:t>Schularten m. mehr. BG</a:t>
             </a:r>
           </a:p>
         </p:txBody>
@@ -9502,7 +9502,7 @@
                 </a:solidFill>
                 <a:latin typeface="Cambria"/>
               </a:rPr>
-              <a:t>8,8 %</a:t>
+              <a:t>13 %</a:t>
             </a:r>
           </a:p>
         </p:txBody>
@@ -9541,7 +9541,7 @@
                 </a:solidFill>
                 <a:latin typeface="Calibri"/>
               </a:rPr>
-              <a:t>Realschulen</a:t>
+              <a:t>Hauptschulen</a:t>
             </a:r>
           </a:p>
         </p:txBody>
@@ -9624,7 +9624,7 @@
                 </a:solidFill>
                 <a:latin typeface="Cambria"/>
               </a:rPr>
-              <a:t>3,9 %</a:t>
+              <a:t>5 %</a:t>
             </a:r>
           </a:p>
         </p:txBody>
@@ -9663,7 +9663,7 @@
                 </a:solidFill>
                 <a:latin typeface="Calibri"/>
               </a:rPr>
-              <a:t>Förderschulen</a:t>
+              <a:t>Realschulen</a:t>
             </a:r>
           </a:p>
         </p:txBody>
@@ -9746,7 +9746,7 @@
                 </a:solidFill>
                 <a:latin typeface="Cambria"/>
               </a:rPr>
-              <a:t>3,8 %</a:t>
+              <a:t>~3 %</a:t>
             </a:r>
           </a:p>
         </p:txBody>
@@ -9785,7 +9785,7 @@
                 </a:solidFill>
                 <a:latin typeface="Calibri"/>
               </a:rPr>
-              <a:t>Hauptschulen</a:t>
+              <a:t>Gymnasien (G8/G9)</a:t>
             </a:r>
           </a:p>
         </p:txBody>
@@ -9824,7 +9824,7 @@
                 </a:solidFill>
                 <a:latin typeface="Calibri"/>
               </a:rPr>
-              <a:t>Schüleranteil je Schulart (Deutschland 2023): Gymnasial-/Gesamtschulanteil bestimmt die Abiturquote mit.</a:t>
+              <a:t>Herkunft der Abgänge ohne Hauptschulabschluss nach Schulart (DE 2023, Destatis 21111-12): Förderschulen stellen 42 %, integrierte Gesamtschulen 22 % – von Gymnasien nur rund 3 %.</a:t>
             </a:r>
           </a:p>
         </p:txBody>

--- a/Schulabschluss_DataStory_Praesentation.pptx
+++ b/Schulabschluss_DataStory_Praesentation.pptx
@@ -8286,8 +8286,8 @@
         </p:blipFill>
         <p:spPr>
           <a:xfrm>
-            <a:off x="5989320" y="2083765"/>
-            <a:ext cx="5943600" cy="3879189"/>
+            <a:off x="5989320" y="2287828"/>
+            <a:ext cx="5943600" cy="3471062"/>
           </a:xfrm>
           <a:prstGeom prst="rect">
             <a:avLst/>

--- a/Schulabschluss_DataStory_Praesentation.pptx
+++ b/Schulabschluss_DataStory_Praesentation.pptx
@@ -8680,8 +8680,8 @@
         </p:blipFill>
         <p:spPr>
           <a:xfrm>
-            <a:off x="5989320" y="2081783"/>
-            <a:ext cx="5943600" cy="3883152"/>
+            <a:off x="5989320" y="2380413"/>
+            <a:ext cx="5943600" cy="3285892"/>
           </a:xfrm>
           <a:prstGeom prst="rect">
             <a:avLst/>
@@ -8763,7 +8763,7 @@
                 </a:solidFill>
                 <a:latin typeface="Calibri"/>
               </a:rPr>
-              <a:t>•  Geschlechtergefälle in beide Richtungen</a:t>
+              <a:t>•  Abweichung zwischen den Geschlechtern in beide Richtungen</a:t>
             </a:r>
           </a:p>
           <a:p>
@@ -8782,7 +8782,7 @@
                 </a:solidFill>
                 <a:latin typeface="Calibri"/>
               </a:rPr>
-              <a:t>•  Deutschland, Abgangsjahr 2023</a:t>
+              <a:t>•  Standard Deutschland – je Bundesland filterbar (2023)</a:t>
             </a:r>
           </a:p>
         </p:txBody>

--- a/Schulabschluss_DataStory_Praesentation.pptx
+++ b/Schulabschluss_DataStory_Praesentation.pptx
@@ -5172,8 +5172,8 @@
         </p:blipFill>
         <p:spPr>
           <a:xfrm>
-            <a:off x="5989320" y="2321509"/>
-            <a:ext cx="5943600" cy="3403701"/>
+            <a:off x="5989320" y="2380413"/>
+            <a:ext cx="5943600" cy="3285892"/>
           </a:xfrm>
           <a:prstGeom prst="rect">
             <a:avLst/>

--- a/Schulabschluss_DataStory_Praesentation.pptx
+++ b/Schulabschluss_DataStory_Praesentation.pptx
@@ -7892,8 +7892,8 @@
         </p:blipFill>
         <p:spPr>
           <a:xfrm>
-            <a:off x="5989320" y="2081783"/>
-            <a:ext cx="5943600" cy="3883152"/>
+            <a:off x="5989320" y="2380413"/>
+            <a:ext cx="5943600" cy="3285892"/>
           </a:xfrm>
           <a:prstGeom prst="rect">
             <a:avLst/>
@@ -8286,8 +8286,8 @@
         </p:blipFill>
         <p:spPr>
           <a:xfrm>
-            <a:off x="5989320" y="2287828"/>
-            <a:ext cx="5943600" cy="3471062"/>
+            <a:off x="5989320" y="2380413"/>
+            <a:ext cx="5943600" cy="3285892"/>
           </a:xfrm>
           <a:prstGeom prst="rect">
             <a:avLst/>
@@ -10038,8 +10038,8 @@
         </p:blipFill>
         <p:spPr>
           <a:xfrm>
-            <a:off x="5989320" y="2313584"/>
-            <a:ext cx="5943600" cy="3419551"/>
+            <a:off x="5989320" y="2380413"/>
+            <a:ext cx="5943600" cy="3285892"/>
           </a:xfrm>
           <a:prstGeom prst="rect">
             <a:avLst/>
